--- a/proposal/股文觀指_商業簡報.pptx
+++ b/proposal/股文觀指_商業簡報.pptx
@@ -2794,7 +2794,7 @@
                 <a:ea typeface="Microsoft JhengHei" pitchFamily="34" charset="-122"/>
                 <a:cs typeface="Microsoft JhengHei" pitchFamily="34" charset="-120"/>
               </a:rPr>
-              <a:t>99 樣本 / 10 天 / 樣本加權 · 真實 TWSE OHLC</a:t>
+              <a:t>166 樣本 / 10 天 / 樣本加權 · 真實 TWSE OHLC</a:t>
             </a:r>
             <a:endParaRPr lang="en-US" sz="1100" dirty="0"/>
           </a:p>
@@ -4258,7 +4258,7 @@
                           <a:ea typeface="Microsoft JhengHei" pitchFamily="34" charset="-122"/>
                           <a:cs typeface="Microsoft JhengHei" pitchFamily="34" charset="-120"/>
                         </a:rPr>
-                        <a:t>✓ 99 樣本</a:t>
+                        <a:t>✓ 166 樣本</a:t>
                       </a:r>
                       <a:endParaRPr lang="en-US" sz="1200" dirty="0">
                         <a:latin typeface="Microsoft JhengHei" charset="0"/>
@@ -7553,7 +7553,7 @@
                 <a:ea typeface="Microsoft JhengHei" pitchFamily="34" charset="-122"/>
                 <a:cs typeface="Microsoft JhengHei" pitchFamily="34" charset="-120"/>
               </a:rPr>
-              <a:t>公開 79% 勝率、99 樣本回測、開源演算法，建立差異化信任</a:t>
+              <a:t>公開 71% 勝率、166 樣本回測、開源演算法，建立差異化信任</a:t>
             </a:r>
             <a:endParaRPr lang="en-US" sz="1200" dirty="0"/>
           </a:p>
@@ -8967,7 +8967,7 @@
                 <a:ea typeface="Microsoft JhengHei" pitchFamily="34" charset="-122"/>
                 <a:cs typeface="Microsoft JhengHei" pitchFamily="34" charset="-120"/>
               </a:rPr>
-              <a:t>目前回測僅 99 筆 / 10 天，未涵蓋多空頭循環。績效在不同市況下會有顯著差異。</a:t>
+              <a:t>目前回測僅 166 筆 / 10 天，未涵蓋多空頭循環。績效在不同市況下會有顯著差異。</a:t>
             </a:r>
             <a:endParaRPr lang="en-US" sz="1100" dirty="0"/>
           </a:p>
@@ -12856,7 +12856,7 @@
                 <a:ea typeface="Microsoft JhengHei" pitchFamily="34" charset="-122"/>
                 <a:cs typeface="Microsoft JhengHei" pitchFamily="34" charset="-120"/>
               </a:rPr>
-              <a:t>99</a:t>
+              <a:t>166</a:t>
             </a:r>
             <a:endParaRPr lang="en-US" sz="6000" dirty="0"/>
           </a:p>
@@ -14385,7 +14385,7 @@
                 <a:ea typeface="Microsoft JhengHei" pitchFamily="34" charset="-122"/>
                 <a:cs typeface="Microsoft JhengHei" pitchFamily="34" charset="-120"/>
               </a:rPr>
-              <a:t>回測結果（10 天 / 99 樣本）</a:t>
+              <a:t>回測結果（10 天 / 166 樣本）</a:t>
             </a:r>
             <a:endParaRPr lang="en-US" sz="1800" dirty="0"/>
           </a:p>
@@ -14463,7 +14463,7 @@
                 <a:ea typeface="Microsoft JhengHei" pitchFamily="34" charset="-122"/>
                 <a:cs typeface="Microsoft JhengHei" pitchFamily="34" charset="-120"/>
               </a:rPr>
-              <a:t>79%</a:t>
+              <a:t>71%</a:t>
             </a:r>
             <a:endParaRPr lang="en-US" sz="22000" dirty="0"/>
           </a:p>
@@ -14541,7 +14541,7 @@
                 <a:ea typeface="Microsoft JhengHei" pitchFamily="34" charset="-122"/>
                 <a:cs typeface="Microsoft JhengHei" pitchFamily="34" charset="-120"/>
               </a:rPr>
-              <a:t>78 / 99</a:t>
+              <a:t>118 / 166</a:t>
             </a:r>
             <a:endParaRPr lang="en-US" sz="2200" dirty="0"/>
           </a:p>
@@ -14619,7 +14619,7 @@
                 <a:ea typeface="Microsoft JhengHei" pitchFamily="34" charset="-122"/>
                 <a:cs typeface="Microsoft JhengHei" pitchFamily="34" charset="-120"/>
               </a:rPr>
-              <a:t>+3.25%</a:t>
+              <a:t>+2.72%</a:t>
             </a:r>
             <a:endParaRPr lang="en-US" sz="2200" dirty="0"/>
           </a:p>

--- a/proposal/股文觀指_商業簡報.pptx
+++ b/proposal/股文觀指_商業簡報.pptx
@@ -2794,7 +2794,7 @@
                 <a:ea typeface="Microsoft JhengHei" pitchFamily="34" charset="-122"/>
                 <a:cs typeface="Microsoft JhengHei" pitchFamily="34" charset="-120"/>
               </a:rPr>
-              <a:t>166 樣本 / 10 天 / 樣本加權 · 真實 TWSE OHLC</a:t>
+              <a:t>185 樣本 / 10 天 / 樣本加權 · 真實 TWSE OHLC</a:t>
             </a:r>
             <a:endParaRPr lang="en-US" sz="1100" dirty="0"/>
           </a:p>
@@ -4258,7 +4258,7 @@
                           <a:ea typeface="Microsoft JhengHei" pitchFamily="34" charset="-122"/>
                           <a:cs typeface="Microsoft JhengHei" pitchFamily="34" charset="-120"/>
                         </a:rPr>
-                        <a:t>✓ 166 樣本</a:t>
+                        <a:t>✓ 185 樣本</a:t>
                       </a:r>
                       <a:endParaRPr lang="en-US" sz="1200" dirty="0">
                         <a:latin typeface="Microsoft JhengHei" charset="0"/>
@@ -7553,7 +7553,7 @@
                 <a:ea typeface="Microsoft JhengHei" pitchFamily="34" charset="-122"/>
                 <a:cs typeface="Microsoft JhengHei" pitchFamily="34" charset="-120"/>
               </a:rPr>
-              <a:t>公開 71% 勝率、166 樣本回測、開源演算法，建立差異化信任</a:t>
+              <a:t>公開 70% 勝率、185 樣本回測、開源演算法，建立差異化信任</a:t>
             </a:r>
             <a:endParaRPr lang="en-US" sz="1200" dirty="0"/>
           </a:p>
@@ -8967,7 +8967,7 @@
                 <a:ea typeface="Microsoft JhengHei" pitchFamily="34" charset="-122"/>
                 <a:cs typeface="Microsoft JhengHei" pitchFamily="34" charset="-120"/>
               </a:rPr>
-              <a:t>目前回測僅 166 筆 / 10 天，未涵蓋多空頭循環。績效在不同市況下會有顯著差異。</a:t>
+              <a:t>目前回測僅 185 筆 / 10 天，未涵蓋多空頭循環。績效在不同市況下會有顯著差異。</a:t>
             </a:r>
             <a:endParaRPr lang="en-US" sz="1100" dirty="0"/>
           </a:p>
@@ -12856,7 +12856,7 @@
                 <a:ea typeface="Microsoft JhengHei" pitchFamily="34" charset="-122"/>
                 <a:cs typeface="Microsoft JhengHei" pitchFamily="34" charset="-120"/>
               </a:rPr>
-              <a:t>166</a:t>
+              <a:t>185</a:t>
             </a:r>
             <a:endParaRPr lang="en-US" sz="6000" dirty="0"/>
           </a:p>
@@ -14385,7 +14385,7 @@
                 <a:ea typeface="Microsoft JhengHei" pitchFamily="34" charset="-122"/>
                 <a:cs typeface="Microsoft JhengHei" pitchFamily="34" charset="-120"/>
               </a:rPr>
-              <a:t>回測結果（10 天 / 166 樣本）</a:t>
+              <a:t>回測結果（10 天 / 185 樣本）</a:t>
             </a:r>
             <a:endParaRPr lang="en-US" sz="1800" dirty="0"/>
           </a:p>
@@ -14463,7 +14463,7 @@
                 <a:ea typeface="Microsoft JhengHei" pitchFamily="34" charset="-122"/>
                 <a:cs typeface="Microsoft JhengHei" pitchFamily="34" charset="-120"/>
               </a:rPr>
-              <a:t>71%</a:t>
+              <a:t>70%</a:t>
             </a:r>
             <a:endParaRPr lang="en-US" sz="22000" dirty="0"/>
           </a:p>
@@ -14541,7 +14541,7 @@
                 <a:ea typeface="Microsoft JhengHei" pitchFamily="34" charset="-122"/>
                 <a:cs typeface="Microsoft JhengHei" pitchFamily="34" charset="-120"/>
               </a:rPr>
-              <a:t>118 / 166</a:t>
+              <a:t>130 / 185</a:t>
             </a:r>
             <a:endParaRPr lang="en-US" sz="2200" dirty="0"/>
           </a:p>
@@ -14619,7 +14619,7 @@
                 <a:ea typeface="Microsoft JhengHei" pitchFamily="34" charset="-122"/>
                 <a:cs typeface="Microsoft JhengHei" pitchFamily="34" charset="-120"/>
               </a:rPr>
-              <a:t>+2.72%</a:t>
+              <a:t>+2.58%</a:t>
             </a:r>
             <a:endParaRPr lang="en-US" sz="2200" dirty="0"/>
           </a:p>

--- a/proposal/股文觀指_商業簡報.pptx
+++ b/proposal/股文觀指_商業簡報.pptx
@@ -2794,7 +2794,7 @@
                 <a:ea typeface="Microsoft JhengHei" pitchFamily="34" charset="-122"/>
                 <a:cs typeface="Microsoft JhengHei" pitchFamily="34" charset="-120"/>
               </a:rPr>
-              <a:t>185 樣本 / 10 天 / 樣本加權 · 真實 TWSE OHLC</a:t>
+              <a:t>192 樣本 / 10 天 / 樣本加權 · 真實 TWSE OHLC</a:t>
             </a:r>
             <a:endParaRPr lang="en-US" sz="1100" dirty="0"/>
           </a:p>
@@ -4258,7 +4258,7 @@
                           <a:ea typeface="Microsoft JhengHei" pitchFamily="34" charset="-122"/>
                           <a:cs typeface="Microsoft JhengHei" pitchFamily="34" charset="-120"/>
                         </a:rPr>
-                        <a:t>✓ 185 樣本</a:t>
+                        <a:t>✓ 192 樣本</a:t>
                       </a:r>
                       <a:endParaRPr lang="en-US" sz="1200" dirty="0">
                         <a:latin typeface="Microsoft JhengHei" charset="0"/>
@@ -7553,7 +7553,7 @@
                 <a:ea typeface="Microsoft JhengHei" pitchFamily="34" charset="-122"/>
                 <a:cs typeface="Microsoft JhengHei" pitchFamily="34" charset="-120"/>
               </a:rPr>
-              <a:t>公開 70% 勝率、185 樣本回測、開源演算法，建立差異化信任</a:t>
+              <a:t>公開 67% 勝率、192 樣本回測、開源演算法，建立差異化信任</a:t>
             </a:r>
             <a:endParaRPr lang="en-US" sz="1200" dirty="0"/>
           </a:p>
@@ -8967,7 +8967,7 @@
                 <a:ea typeface="Microsoft JhengHei" pitchFamily="34" charset="-122"/>
                 <a:cs typeface="Microsoft JhengHei" pitchFamily="34" charset="-120"/>
               </a:rPr>
-              <a:t>目前回測僅 185 筆 / 10 天，未涵蓋多空頭循環。績效在不同市況下會有顯著差異。</a:t>
+              <a:t>目前回測僅 192 筆 / 10 天，未涵蓋多空頭循環。績效在不同市況下會有顯著差異。</a:t>
             </a:r>
             <a:endParaRPr lang="en-US" sz="1100" dirty="0"/>
           </a:p>
@@ -12856,7 +12856,7 @@
                 <a:ea typeface="Microsoft JhengHei" pitchFamily="34" charset="-122"/>
                 <a:cs typeface="Microsoft JhengHei" pitchFamily="34" charset="-120"/>
               </a:rPr>
-              <a:t>185</a:t>
+              <a:t>192</a:t>
             </a:r>
             <a:endParaRPr lang="en-US" sz="6000" dirty="0"/>
           </a:p>
@@ -14385,7 +14385,7 @@
                 <a:ea typeface="Microsoft JhengHei" pitchFamily="34" charset="-122"/>
                 <a:cs typeface="Microsoft JhengHei" pitchFamily="34" charset="-120"/>
               </a:rPr>
-              <a:t>回測結果（10 天 / 185 樣本）</a:t>
+              <a:t>回測結果（10 天 / 192 樣本）</a:t>
             </a:r>
             <a:endParaRPr lang="en-US" sz="1800" dirty="0"/>
           </a:p>
@@ -14463,7 +14463,7 @@
                 <a:ea typeface="Microsoft JhengHei" pitchFamily="34" charset="-122"/>
                 <a:cs typeface="Microsoft JhengHei" pitchFamily="34" charset="-120"/>
               </a:rPr>
-              <a:t>70%</a:t>
+              <a:t>67%</a:t>
             </a:r>
             <a:endParaRPr lang="en-US" sz="22000" dirty="0"/>
           </a:p>
@@ -14541,7 +14541,7 @@
                 <a:ea typeface="Microsoft JhengHei" pitchFamily="34" charset="-122"/>
                 <a:cs typeface="Microsoft JhengHei" pitchFamily="34" charset="-120"/>
               </a:rPr>
-              <a:t>130 / 185</a:t>
+              <a:t>128 / 192</a:t>
             </a:r>
             <a:endParaRPr lang="en-US" sz="2200" dirty="0"/>
           </a:p>
@@ -14619,7 +14619,7 @@
                 <a:ea typeface="Microsoft JhengHei" pitchFamily="34" charset="-122"/>
                 <a:cs typeface="Microsoft JhengHei" pitchFamily="34" charset="-120"/>
               </a:rPr>
-              <a:t>+2.58%</a:t>
+              <a:t>+2.42%</a:t>
             </a:r>
             <a:endParaRPr lang="en-US" sz="2200" dirty="0"/>
           </a:p>
